--- a/lesson_14-rest_and_api/lesson_14-rest_and_api.pptx
+++ b/lesson_14-rest_and_api/lesson_14-rest_and_api.pptx
@@ -236,7 +236,7 @@
           <a:p>
             <a:fld id="{251090E0-FB0C-49E9-9864-9F53EABEA96F}" type="datetimeFigureOut">
               <a:rPr lang="en-GB" smtClean="0"/>
-              <a:t>10/02/2026</a:t>
+              <a:t>19/02/2026</a:t>
             </a:fld>
             <a:endParaRPr lang="en-GB"/>
           </a:p>
@@ -7764,6 +7764,9 @@
             </a:r>
           </a:p>
           <a:p>
+            <a:endParaRPr lang="en-GB" dirty="0"/>
+          </a:p>
+          <a:p>
             <a:r>
               <a:rPr lang="en-GB" dirty="0"/>
               <a:t>REST defines a set of </a:t>
@@ -7778,6 +7781,9 @@
             </a:r>
           </a:p>
           <a:p>
+            <a:endParaRPr lang="en-GB" dirty="0"/>
+          </a:p>
+          <a:p>
             <a:r>
               <a:rPr lang="en-GB" dirty="0"/>
               <a:t>Introduced in 2000 by </a:t>
@@ -7790,46 +7796,6 @@
               <a:rPr lang="en-GB" dirty="0"/>
               <a:t>(co-founder of the Apache HTTP Server project) in his doctoral dissertation (University of California, Irvine).</a:t>
             </a:r>
-          </a:p>
-          <a:p>
-            <a:r>
-              <a:rPr lang="en-GB" dirty="0"/>
-              <a:t>The name “Representational State Transfer” evokes an image of how a well-designed Web application behaves: </a:t>
-            </a:r>
-          </a:p>
-          <a:p>
-            <a:pPr lvl="1"/>
-            <a:r>
-              <a:rPr lang="en-GB" sz="2200" dirty="0"/>
-              <a:t>a Web application forms a virtual state machine</a:t>
-            </a:r>
-          </a:p>
-          <a:p>
-            <a:pPr lvl="1"/>
-            <a:r>
-              <a:rPr lang="en-GB" sz="2200" dirty="0"/>
-              <a:t>the user progresses through the application by selecting a link or submitting a data-entry</a:t>
-            </a:r>
-          </a:p>
-          <a:p>
-            <a:pPr lvl="1"/>
-            <a:r>
-              <a:rPr lang="en-GB" sz="2200" dirty="0"/>
-              <a:t>each user action results in a transition to the next state of the application </a:t>
-            </a:r>
-            <a:r>
-              <a:rPr lang="en-GB" sz="2200" dirty="0">
-                <a:sym typeface="Wingdings" panose="05000000000000000000" pitchFamily="2" charset="2"/>
-              </a:rPr>
-              <a:t> </a:t>
-            </a:r>
-            <a:r>
-              <a:rPr lang="en-GB" sz="2200" dirty="0"/>
-              <a:t>a representation of that state is transferred to the user.</a:t>
-            </a:r>
-          </a:p>
-          <a:p>
-            <a:endParaRPr lang="en-GB" dirty="0"/>
           </a:p>
         </p:txBody>
       </p:sp>
@@ -10570,26 +10536,7 @@
               <a:rPr lang="it-IT" sz="2200" dirty="0" err="1"/>
               <a:t>approach</a:t>
             </a:r>
-            <a:r>
-              <a:rPr lang="it-IT" sz="2200" dirty="0"/>
-              <a:t>, </a:t>
-            </a:r>
-            <a:r>
-              <a:rPr lang="it-IT" sz="2200" dirty="0" err="1"/>
-              <a:t>proposed</a:t>
-            </a:r>
-            <a:r>
-              <a:rPr lang="it-IT" sz="2200" dirty="0"/>
-              <a:t> by Bruce </a:t>
-            </a:r>
-            <a:r>
-              <a:rPr lang="it-IT" sz="2200" dirty="0" err="1"/>
-              <a:t>Jay</a:t>
-            </a:r>
-            <a:r>
-              <a:rPr lang="it-IT" sz="2200" dirty="0"/>
-              <a:t> Nelson in 1981.</a:t>
-            </a:r>
+            <a:endParaRPr lang="it-IT" sz="2200" dirty="0"/>
           </a:p>
           <a:p>
             <a:r>
@@ -10873,50 +10820,6 @@
           <a:p>
             <a:pPr fontAlgn="base"/>
             <a:r>
-              <a:rPr lang="en-GB" dirty="0"/>
-              <a:t>Different RPC protocols: </a:t>
-            </a:r>
-          </a:p>
-          <a:p>
-            <a:pPr lvl="1" fontAlgn="base"/>
-            <a:r>
-              <a:rPr lang="it-IT" dirty="0"/>
-              <a:t>1997: XML-RPC </a:t>
-            </a:r>
-            <a:r>
-              <a:rPr lang="en-GB" dirty="0"/>
-              <a:t>uses XML to encode its calls and HTTP to send requests and responses</a:t>
-            </a:r>
-          </a:p>
-          <a:p>
-            <a:pPr lvl="1" fontAlgn="base"/>
-            <a:r>
-              <a:rPr lang="it-IT" dirty="0"/>
-              <a:t>2005: JSON-RPC </a:t>
-            </a:r>
-            <a:r>
-              <a:rPr lang="en-GB" dirty="0"/>
-              <a:t>uses JSON to encode data and HTTP to send requests and responses</a:t>
-            </a:r>
-          </a:p>
-          <a:p>
-            <a:pPr lvl="1" fontAlgn="base"/>
-            <a:r>
-              <a:rPr lang="en-GB" dirty="0"/>
-              <a:t>2016: Google RPC (</a:t>
-            </a:r>
-            <a:r>
-              <a:rPr lang="en-GB" dirty="0" err="1"/>
-              <a:t>gRPC</a:t>
-            </a:r>
-            <a:r>
-              <a:rPr lang="en-GB" dirty="0"/>
-              <a:t>) uses Protocol Buffers to encode data and HTTP/2 to send requests/responses</a:t>
-            </a:r>
-          </a:p>
-          <a:p>
-            <a:pPr fontAlgn="base"/>
-            <a:r>
               <a:rPr lang="en-GB" u="sng" dirty="0"/>
               <a:t>Pros</a:t>
             </a:r>
@@ -11031,12 +10934,11 @@
             </a:r>
             <a:r>
               <a:rPr lang="it-IT" dirty="0"/>
-              <a:t> </a:t>
-            </a:r>
-            <a:r>
-              <a:rPr lang="it-IT" dirty="0" err="1"/>
-              <a:t>payloads</a:t>
-            </a:r>
+              <a:t> payloads</a:t>
+            </a:r>
+          </a:p>
+          <a:p>
+            <a:pPr lvl="1" fontAlgn="base"/>
             <a:endParaRPr lang="it-IT" dirty="0"/>
           </a:p>
           <a:p>
@@ -11066,6 +10968,12 @@
               </a:rPr>
               <a:t> low reusability of the API</a:t>
             </a:r>
+          </a:p>
+          <a:p>
+            <a:pPr lvl="1" fontAlgn="base"/>
+            <a:endParaRPr lang="en-GB" dirty="0">
+              <a:sym typeface="Wingdings" panose="05000000000000000000" pitchFamily="2" charset="2"/>
+            </a:endParaRPr>
           </a:p>
           <a:p>
             <a:pPr fontAlgn="base"/>
@@ -11157,7 +11065,7 @@
                                         <p:tgtEl>
                                           <p:spTgt spid="3">
                                             <p:txEl>
-                                              <p:pRg st="4" end="4"/>
+                                              <p:pRg st="0" end="0"/>
                                             </p:txEl>
                                           </p:spTgt>
                                         </p:tgtEl>
@@ -11188,7 +11096,7 @@
                                         <p:tgtEl>
                                           <p:spTgt spid="3">
                                             <p:txEl>
-                                              <p:pRg st="5" end="5"/>
+                                              <p:pRg st="1" end="1"/>
                                             </p:txEl>
                                           </p:spTgt>
                                         </p:tgtEl>
@@ -11219,7 +11127,7 @@
                                         <p:tgtEl>
                                           <p:spTgt spid="3">
                                             <p:txEl>
-                                              <p:pRg st="6" end="6"/>
+                                              <p:pRg st="2" end="2"/>
                                             </p:txEl>
                                           </p:spTgt>
                                         </p:tgtEl>
@@ -11250,7 +11158,7 @@
                                         <p:tgtEl>
                                           <p:spTgt spid="3">
                                             <p:txEl>
-                                              <p:pRg st="7" end="7"/>
+                                              <p:pRg st="3" end="3"/>
                                             </p:txEl>
                                           </p:spTgt>
                                         </p:tgtEl>
@@ -11299,7 +11207,7 @@
                                         <p:tgtEl>
                                           <p:spTgt spid="3">
                                             <p:txEl>
-                                              <p:pRg st="8" end="8"/>
+                                              <p:pRg st="5" end="5"/>
                                             </p:txEl>
                                           </p:spTgt>
                                         </p:tgtEl>
@@ -11330,7 +11238,7 @@
                                         <p:tgtEl>
                                           <p:spTgt spid="3">
                                             <p:txEl>
-                                              <p:pRg st="9" end="9"/>
+                                              <p:pRg st="6" end="6"/>
                                             </p:txEl>
                                           </p:spTgt>
                                         </p:tgtEl>
@@ -11379,7 +11287,7 @@
                                         <p:tgtEl>
                                           <p:spTgt spid="3">
                                             <p:txEl>
-                                              <p:pRg st="10" end="10"/>
+                                              <p:pRg st="8" end="8"/>
                                             </p:txEl>
                                           </p:spTgt>
                                         </p:tgtEl>
